--- a/0906.pptx
+++ b/0906.pptx
@@ -7,6 +7,7 @@
   <p:sldIdLst>
     <p:sldId id="256" r:id="rId2"/>
     <p:sldId id="257" r:id="rId3"/>
+    <p:sldId id="259" r:id="rId4"/>
   </p:sldIdLst>
   <p:sldSz cx="12192000" cy="6858000"/>
   <p:notesSz cx="6858000" cy="9144000"/>
@@ -105,6 +106,11 @@
       </a:defRPr>
     </a:lvl9pPr>
   </p:defaultTextStyle>
+  <p:extLst>
+    <p:ext uri="{EFAFB233-063F-42B5-8137-9DF3F51BA10A}">
+      <p15:sldGuideLst xmlns:p15="http://schemas.microsoft.com/office/powerpoint/2012/main"/>
+    </p:ext>
+  </p:extLst>
 </p:presentation>
 </file>
 
@@ -4207,6 +4213,227 @@
     <p:extLst>
       <p:ext uri="{BB962C8B-B14F-4D97-AF65-F5344CB8AC3E}">
         <p14:creationId xmlns:p14="http://schemas.microsoft.com/office/powerpoint/2010/main" val="1119781599"/>
+      </p:ext>
+    </p:extLst>
+  </p:cSld>
+  <p:clrMapOvr>
+    <a:masterClrMapping/>
+  </p:clrMapOvr>
+</p:sld>
+</file>
+
+<file path=ppt/slides/slide3.xml><?xml version="1.0" encoding="utf-8"?>
+<p:sld xmlns:a="http://schemas.openxmlformats.org/drawingml/2006/main" xmlns:r="http://schemas.openxmlformats.org/officeDocument/2006/relationships" xmlns:p="http://schemas.openxmlformats.org/presentationml/2006/main">
+  <p:cSld>
+    <p:spTree>
+      <p:nvGrpSpPr>
+        <p:cNvPr id="1" name="">
+          <a:extLst>
+            <a:ext uri="{FF2B5EF4-FFF2-40B4-BE49-F238E27FC236}">
+              <a16:creationId xmlns:a16="http://schemas.microsoft.com/office/drawing/2014/main" id="{629A30FC-359F-DF08-8F8B-BFB28EF33938}"/>
+            </a:ext>
+          </a:extLst>
+        </p:cNvPr>
+        <p:cNvGrpSpPr/>
+        <p:nvPr/>
+      </p:nvGrpSpPr>
+      <p:grpSpPr>
+        <a:xfrm>
+          <a:off x="0" y="0"/>
+          <a:ext cx="0" cy="0"/>
+          <a:chOff x="0" y="0"/>
+          <a:chExt cx="0" cy="0"/>
+        </a:xfrm>
+      </p:grpSpPr>
+      <p:sp>
+        <p:nvSpPr>
+          <p:cNvPr id="4" name="CasellaDiTesto 3">
+            <a:extLst>
+              <a:ext uri="{FF2B5EF4-FFF2-40B4-BE49-F238E27FC236}">
+                <a16:creationId xmlns:a16="http://schemas.microsoft.com/office/drawing/2014/main" id="{9A6F1B84-B851-4FD3-2DC6-6B4D942FB7C8}"/>
+              </a:ext>
+            </a:extLst>
+          </p:cNvPr>
+          <p:cNvSpPr txBox="1"/>
+          <p:nvPr/>
+        </p:nvSpPr>
+        <p:spPr>
+          <a:xfrm>
+            <a:off x="571500" y="457200"/>
+            <a:ext cx="2690813" cy="923330"/>
+          </a:xfrm>
+          <a:prstGeom prst="rect">
+            <a:avLst/>
+          </a:prstGeom>
+          <a:solidFill>
+            <a:schemeClr val="accent2"/>
+          </a:solidFill>
+        </p:spPr>
+        <p:txBody>
+          <a:bodyPr wrap="square" rtlCol="0">
+            <a:spAutoFit/>
+          </a:bodyPr>
+          <a:lstStyle/>
+          <a:p>
+            <a:r>
+              <a:rPr lang="it-IT" dirty="0"/>
+              <a:t>Importo fattura:_</a:t>
+            </a:r>
+          </a:p>
+          <a:p>
+            <a:endParaRPr lang="it-IT" dirty="0"/>
+          </a:p>
+          <a:p>
+            <a:r>
+              <a:rPr lang="it-IT" dirty="0"/>
+              <a:t>Tipologia prodotto:_</a:t>
+            </a:r>
+          </a:p>
+        </p:txBody>
+      </p:sp>
+      <p:sp>
+        <p:nvSpPr>
+          <p:cNvPr id="5" name="CasellaDiTesto 4">
+            <a:extLst>
+              <a:ext uri="{FF2B5EF4-FFF2-40B4-BE49-F238E27FC236}">
+                <a16:creationId xmlns:a16="http://schemas.microsoft.com/office/drawing/2014/main" id="{AA0D6FB1-DA7E-2B98-64F6-576FA04BA48E}"/>
+              </a:ext>
+            </a:extLst>
+          </p:cNvPr>
+          <p:cNvSpPr txBox="1"/>
+          <p:nvPr/>
+        </p:nvSpPr>
+        <p:spPr>
+          <a:xfrm>
+            <a:off x="614363" y="1976438"/>
+            <a:ext cx="7543800" cy="369332"/>
+          </a:xfrm>
+          <a:prstGeom prst="rect">
+            <a:avLst/>
+          </a:prstGeom>
+          <a:solidFill>
+            <a:schemeClr val="accent1">
+              <a:lumMod val="60000"/>
+              <a:lumOff val="40000"/>
+            </a:schemeClr>
+          </a:solidFill>
+        </p:spPr>
+        <p:txBody>
+          <a:bodyPr wrap="square" rtlCol="0">
+            <a:spAutoFit/>
+          </a:bodyPr>
+          <a:lstStyle/>
+          <a:p>
+            <a:r>
+              <a:rPr lang="it-IT" dirty="0"/>
+              <a:t>Con il prodotto di tipologia: xxx hai un’iva al: x% e un saldo di:</a:t>
+            </a:r>
+            <a:r>
+              <a:rPr lang="it-IT" dirty="0">
+                <a:sym typeface="Wingdings" panose="05000000000000000000" pitchFamily="2" charset="2"/>
+              </a:rPr>
+              <a:t> (calcolo)</a:t>
+            </a:r>
+            <a:endParaRPr lang="it-IT" dirty="0"/>
+          </a:p>
+        </p:txBody>
+      </p:sp>
+      <p:cxnSp>
+        <p:nvCxnSpPr>
+          <p:cNvPr id="3" name="Connettore 2 2">
+            <a:extLst>
+              <a:ext uri="{FF2B5EF4-FFF2-40B4-BE49-F238E27FC236}">
+                <a16:creationId xmlns:a16="http://schemas.microsoft.com/office/drawing/2014/main" id="{C522CB6A-405C-9FE4-6F9A-DA82A27D9A2E}"/>
+              </a:ext>
+            </a:extLst>
+          </p:cNvPr>
+          <p:cNvCxnSpPr/>
+          <p:nvPr/>
+        </p:nvCxnSpPr>
+        <p:spPr>
+          <a:xfrm flipV="1">
+            <a:off x="2786063" y="642938"/>
+            <a:ext cx="2795587" cy="566737"/>
+          </a:xfrm>
+          <a:prstGeom prst="straightConnector1">
+            <a:avLst/>
+          </a:prstGeom>
+          <a:ln>
+            <a:tailEnd type="triangle"/>
+          </a:ln>
+        </p:spPr>
+        <p:style>
+          <a:lnRef idx="2">
+            <a:schemeClr val="accent1"/>
+          </a:lnRef>
+          <a:fillRef idx="0">
+            <a:schemeClr val="accent1"/>
+          </a:fillRef>
+          <a:effectRef idx="1">
+            <a:schemeClr val="accent1"/>
+          </a:effectRef>
+          <a:fontRef idx="minor">
+            <a:schemeClr val="tx1"/>
+          </a:fontRef>
+        </p:style>
+      </p:cxnSp>
+      <p:sp>
+        <p:nvSpPr>
+          <p:cNvPr id="6" name="CasellaDiTesto 5">
+            <a:extLst>
+              <a:ext uri="{FF2B5EF4-FFF2-40B4-BE49-F238E27FC236}">
+                <a16:creationId xmlns:a16="http://schemas.microsoft.com/office/drawing/2014/main" id="{A0A5D3AB-B73A-B0B7-A6AC-2194D8AEB8F7}"/>
+              </a:ext>
+            </a:extLst>
+          </p:cNvPr>
+          <p:cNvSpPr txBox="1"/>
+          <p:nvPr/>
+        </p:nvSpPr>
+        <p:spPr>
+          <a:xfrm>
+            <a:off x="5686425" y="114300"/>
+            <a:ext cx="2767013" cy="1200329"/>
+          </a:xfrm>
+          <a:prstGeom prst="rect">
+            <a:avLst/>
+          </a:prstGeom>
+          <a:noFill/>
+        </p:spPr>
+        <p:txBody>
+          <a:bodyPr wrap="square" rtlCol="0">
+            <a:spAutoFit/>
+          </a:bodyPr>
+          <a:lstStyle/>
+          <a:p>
+            <a:r>
+              <a:rPr lang="it-IT" dirty="0"/>
+              <a:t>Alimentari (2%)</a:t>
+            </a:r>
+          </a:p>
+          <a:p>
+            <a:r>
+              <a:rPr lang="it-IT" dirty="0"/>
+              <a:t>Edilizia (10%)</a:t>
+            </a:r>
+          </a:p>
+          <a:p>
+            <a:r>
+              <a:rPr lang="it-IT" dirty="0"/>
+              <a:t>Computer (22%)</a:t>
+            </a:r>
+          </a:p>
+          <a:p>
+            <a:r>
+              <a:rPr lang="it-IT" dirty="0"/>
+              <a:t>Lusso (45%)</a:t>
+            </a:r>
+          </a:p>
+        </p:txBody>
+      </p:sp>
+    </p:spTree>
+    <p:extLst>
+      <p:ext uri="{BB962C8B-B14F-4D97-AF65-F5344CB8AC3E}">
+        <p14:creationId xmlns:p14="http://schemas.microsoft.com/office/powerpoint/2010/main" val="740291385"/>
       </p:ext>
     </p:extLst>
   </p:cSld>
